--- a/dist/センゴク盤_紹介資料.pptx
+++ b/dist/センゴク盤_紹介資料.pptx
@@ -3224,7 +3224,7 @@
       <p:grpSpPr/>
       <p:pic>
         <p:nvPicPr>
-          <p:cNvPr id="2" name="Picture 1" descr="logo-title.png"/>
+          <p:cNvPr id="2" name="Picture 1" descr="logo-title-onpaper.png"/>
           <p:cNvPicPr>
             <a:picLocks noChangeAspect="1"/>
           </p:cNvPicPr>
@@ -3238,8 +3238,8 @@
         </p:blipFill>
         <p:spPr>
           <a:xfrm>
-            <a:off x="3036059" y="1655999"/>
-            <a:ext cx="6120000" cy="1836000"/>
+            <a:off x="2676059" y="1584000"/>
+            <a:ext cx="6840000" cy="2052000"/>
           </a:xfrm>
           <a:prstGeom prst="rect">
             <a:avLst/>
@@ -22824,7 +22824,7 @@
     <p:bg>
       <p:bgPr>
         <a:solidFill>
-          <a:srgbClr val="1C1E22"/>
+          <a:srgbClr val="F4F1E8"/>
         </a:solidFill>
         <a:effectLst/>
       </p:bgPr>
@@ -22852,7 +22852,7 @@
         </p:blipFill>
         <p:spPr>
           <a:xfrm>
-            <a:off x="5124059" y="1944000"/>
+            <a:off x="5124059" y="1800000"/>
             <a:ext cx="1944000" cy="1944000"/>
           </a:xfrm>
           <a:prstGeom prst="rect">
@@ -22868,7 +22868,7 @@
         </p:nvSpPr>
         <p:spPr>
           <a:xfrm>
-            <a:off x="0" y="4104000"/>
+            <a:off x="0" y="4031999"/>
             <a:ext cx="12192119" cy="503999"/>
           </a:xfrm>
           <a:prstGeom prst="rect">
@@ -22890,7 +22890,7 @@
             <a:r>
               <a:rPr sz="3000" b="0" spc="400">
                 <a:solidFill>
-                  <a:srgbClr val="F4F1E8"/>
+                  <a:srgbClr val="1C1E22"/>
                 </a:solidFill>
                 <a:latin typeface="Hiragino Mincho ProN"/>
               </a:rPr>
@@ -22907,7 +22907,7 @@
         </p:nvSpPr>
         <p:spPr>
           <a:xfrm>
-            <a:off x="0" y="4788000"/>
+            <a:off x="0" y="4716000"/>
             <a:ext cx="12192119" cy="288000"/>
           </a:xfrm>
           <a:prstGeom prst="rect">
@@ -22929,7 +22929,7 @@
             <a:r>
               <a:rPr sz="1100" b="0" spc="600">
                 <a:solidFill>
-                  <a:srgbClr val="A8A296"/>
+                  <a:srgbClr val="8A8478"/>
                 </a:solidFill>
                 <a:latin typeface="Hiragino Mincho ProN"/>
               </a:rPr>
